--- a/materials/OS-M2/OS-M2-S5-preregistration-slides.pptx
+++ b/materials/OS-M2/OS-M2-S5-preregistration-slides.pptx
@@ -5413,7 +5413,7 @@
             </a:pPr>
             <a:r>
               <a:rPr/>
-              <a:t>09/01/2026</a:t>
+              <a:t>11/01/2026</a:t>
             </a:r>
           </a:p>
         </p:txBody>

--- a/materials/OS-M2/OS-M2-S5-preregistration-slides.pptx
+++ b/materials/OS-M2/OS-M2-S5-preregistration-slides.pptx
@@ -5413,7 +5413,7 @@
             </a:pPr>
             <a:r>
               <a:rPr/>
-              <a:t>11/01/2026</a:t>
+              <a:t>16/01/2026</a:t>
             </a:r>
           </a:p>
         </p:txBody>

--- a/materials/OS-M2/OS-M2-S5-preregistration-slides.pptx
+++ b/materials/OS-M2/OS-M2-S5-preregistration-slides.pptx
@@ -5413,7 +5413,7 @@
             </a:pPr>
             <a:r>
               <a:rPr/>
-              <a:t>16/01/2026</a:t>
+              <a:t>18/01/2026</a:t>
             </a:r>
           </a:p>
         </p:txBody>

--- a/materials/OS-M2/OS-M2-S5-preregistration-slides.pptx
+++ b/materials/OS-M2/OS-M2-S5-preregistration-slides.pptx
@@ -5413,7 +5413,7 @@
             </a:pPr>
             <a:r>
               <a:rPr/>
-              <a:t>18/01/2026</a:t>
+              <a:t>22/01/2026</a:t>
             </a:r>
           </a:p>
         </p:txBody>

--- a/materials/OS-M2/OS-M2-S5-preregistration-slides.pptx
+++ b/materials/OS-M2/OS-M2-S5-preregistration-slides.pptx
@@ -5413,7 +5413,7 @@
             </a:pPr>
             <a:r>
               <a:rPr/>
-              <a:t>22/01/2026</a:t>
+              <a:t>23/01/2026</a:t>
             </a:r>
           </a:p>
         </p:txBody>

--- a/materials/OS-M2/OS-M2-S5-preregistration-slides.pptx
+++ b/materials/OS-M2/OS-M2-S5-preregistration-slides.pptx
@@ -5413,7 +5413,7 @@
             </a:pPr>
             <a:r>
               <a:rPr/>
-              <a:t>23/01/2026</a:t>
+              <a:t>25/01/2026</a:t>
             </a:r>
           </a:p>
         </p:txBody>

--- a/materials/OS-M2/OS-M2-S5-preregistration-slides.pptx
+++ b/materials/OS-M2/OS-M2-S5-preregistration-slides.pptx
@@ -5413,7 +5413,7 @@
             </a:pPr>
             <a:r>
               <a:rPr/>
-              <a:t>25/01/2026</a:t>
+              <a:t>28/01/2026</a:t>
             </a:r>
           </a:p>
         </p:txBody>

--- a/materials/OS-M2/OS-M2-S5-preregistration-slides.pptx
+++ b/materials/OS-M2/OS-M2-S5-preregistration-slides.pptx
@@ -5413,7 +5413,7 @@
             </a:pPr>
             <a:r>
               <a:rPr/>
-              <a:t>28/01/2026</a:t>
+              <a:t>29/01/2026</a:t>
             </a:r>
           </a:p>
         </p:txBody>

--- a/materials/OS-M2/OS-M2-S5-preregistration-slides.pptx
+++ b/materials/OS-M2/OS-M2-S5-preregistration-slides.pptx
@@ -5413,7 +5413,7 @@
             </a:pPr>
             <a:r>
               <a:rPr/>
-              <a:t>29/01/2026</a:t>
+              <a:t>01/02/2026</a:t>
             </a:r>
           </a:p>
         </p:txBody>

--- a/materials/OS-M2/OS-M2-S5-preregistration-slides.pptx
+++ b/materials/OS-M2/OS-M2-S5-preregistration-slides.pptx
@@ -5413,7 +5413,7 @@
             </a:pPr>
             <a:r>
               <a:rPr/>
-              <a:t>01/02/2026</a:t>
+              <a:t>05/02/2026</a:t>
             </a:r>
           </a:p>
         </p:txBody>

--- a/materials/OS-M2/OS-M2-S5-preregistration-slides.pptx
+++ b/materials/OS-M2/OS-M2-S5-preregistration-slides.pptx
@@ -5413,7 +5413,7 @@
             </a:pPr>
             <a:r>
               <a:rPr/>
-              <a:t>05/02/2026</a:t>
+              <a:t>08/02/2026</a:t>
             </a:r>
           </a:p>
         </p:txBody>

--- a/materials/OS-M2/OS-M2-S5-preregistration-slides.pptx
+++ b/materials/OS-M2/OS-M2-S5-preregistration-slides.pptx
@@ -5413,7 +5413,7 @@
             </a:pPr>
             <a:r>
               <a:rPr/>
-              <a:t>08/02/2026</a:t>
+              <a:t>11/02/2026</a:t>
             </a:r>
           </a:p>
         </p:txBody>

--- a/materials/OS-M2/OS-M2-S5-preregistration-slides.pptx
+++ b/materials/OS-M2/OS-M2-S5-preregistration-slides.pptx
@@ -5413,7 +5413,7 @@
             </a:pPr>
             <a:r>
               <a:rPr/>
-              <a:t>11/02/2026</a:t>
+              <a:t>12/02/2026</a:t>
             </a:r>
           </a:p>
         </p:txBody>

--- a/materials/OS-M2/OS-M2-S5-preregistration-slides.pptx
+++ b/materials/OS-M2/OS-M2-S5-preregistration-slides.pptx
@@ -5413,7 +5413,7 @@
             </a:pPr>
             <a:r>
               <a:rPr/>
-              <a:t>12/02/2026</a:t>
+              <a:t>13/02/2026</a:t>
             </a:r>
           </a:p>
         </p:txBody>

--- a/materials/OS-M2/OS-M2-S5-preregistration-slides.pptx
+++ b/materials/OS-M2/OS-M2-S5-preregistration-slides.pptx
@@ -5413,7 +5413,7 @@
             </a:pPr>
             <a:r>
               <a:rPr/>
-              <a:t>13/02/2026</a:t>
+              <a:t>15/02/2026</a:t>
             </a:r>
           </a:p>
         </p:txBody>

--- a/materials/OS-M2/OS-M2-S5-preregistration-slides.pptx
+++ b/materials/OS-M2/OS-M2-S5-preregistration-slides.pptx
@@ -5413,7 +5413,7 @@
             </a:pPr>
             <a:r>
               <a:rPr/>
-              <a:t>15/02/2026</a:t>
+              <a:t>18/02/2026</a:t>
             </a:r>
           </a:p>
         </p:txBody>

--- a/materials/OS-M2/OS-M2-S5-preregistration-slides.pptx
+++ b/materials/OS-M2/OS-M2-S5-preregistration-slides.pptx
@@ -5413,7 +5413,7 @@
             </a:pPr>
             <a:r>
               <a:rPr/>
-              <a:t>18/02/2026</a:t>
+              <a:t>22/02/2026</a:t>
             </a:r>
           </a:p>
         </p:txBody>

--- a/materials/OS-M2/OS-M2-S5-preregistration-slides.pptx
+++ b/materials/OS-M2/OS-M2-S5-preregistration-slides.pptx
@@ -5413,7 +5413,7 @@
             </a:pPr>
             <a:r>
               <a:rPr/>
-              <a:t>22/02/2026</a:t>
+              <a:t>01/03/2026</a:t>
             </a:r>
           </a:p>
         </p:txBody>

--- a/materials/OS-M2/OS-M2-S5-preregistration-slides.pptx
+++ b/materials/OS-M2/OS-M2-S5-preregistration-slides.pptx
@@ -5413,7 +5413,7 @@
             </a:pPr>
             <a:r>
               <a:rPr/>
-              <a:t>01/03/2026</a:t>
+              <a:t>04/03/2026</a:t>
             </a:r>
           </a:p>
         </p:txBody>

--- a/materials/OS-M2/OS-M2-S5-preregistration-slides.pptx
+++ b/materials/OS-M2/OS-M2-S5-preregistration-slides.pptx
@@ -5413,7 +5413,7 @@
             </a:pPr>
             <a:r>
               <a:rPr/>
-              <a:t>04/03/2026</a:t>
+              <a:t>05/03/2026</a:t>
             </a:r>
           </a:p>
         </p:txBody>

--- a/materials/OS-M2/OS-M2-S5-preregistration-slides.pptx
+++ b/materials/OS-M2/OS-M2-S5-preregistration-slides.pptx
@@ -5413,7 +5413,7 @@
             </a:pPr>
             <a:r>
               <a:rPr/>
-              <a:t>05/03/2026</a:t>
+              <a:t>08/03/2026</a:t>
             </a:r>
           </a:p>
         </p:txBody>

--- a/materials/OS-M2/OS-M2-S5-preregistration-slides.pptx
+++ b/materials/OS-M2/OS-M2-S5-preregistration-slides.pptx
@@ -5413,7 +5413,7 @@
             </a:pPr>
             <a:r>
               <a:rPr/>
-              <a:t>08/03/2026</a:t>
+              <a:t>11/03/2026</a:t>
             </a:r>
           </a:p>
         </p:txBody>

--- a/materials/OS-M2/OS-M2-S5-preregistration-slides.pptx
+++ b/materials/OS-M2/OS-M2-S5-preregistration-slides.pptx
@@ -5413,7 +5413,7 @@
             </a:pPr>
             <a:r>
               <a:rPr/>
-              <a:t>11/03/2026</a:t>
+              <a:t>12/03/2026</a:t>
             </a:r>
           </a:p>
         </p:txBody>

--- a/materials/OS-M2/OS-M2-S5-preregistration-slides.pptx
+++ b/materials/OS-M2/OS-M2-S5-preregistration-slides.pptx
@@ -5413,7 +5413,7 @@
             </a:pPr>
             <a:r>
               <a:rPr/>
-              <a:t>12/03/2026</a:t>
+              <a:t>15/03/2026</a:t>
             </a:r>
           </a:p>
         </p:txBody>

--- a/materials/OS-M2/OS-M2-S5-preregistration-slides.pptx
+++ b/materials/OS-M2/OS-M2-S5-preregistration-slides.pptx
@@ -5413,7 +5413,7 @@
             </a:pPr>
             <a:r>
               <a:rPr/>
-              <a:t>15/03/2026</a:t>
+              <a:t>19/03/2026</a:t>
             </a:r>
           </a:p>
         </p:txBody>

--- a/materials/OS-M2/OS-M2-S5-preregistration-slides.pptx
+++ b/materials/OS-M2/OS-M2-S5-preregistration-slides.pptx
@@ -5384,8 +5384,6 @@
             <a:pPr lvl="0" indent="0" marL="0">
               <a:buNone/>
             </a:pPr>
-            <a:br/>
-            <a:br/>
             <a:r>
               <a:rPr/>
               <a:t>Author</a:t>
@@ -5413,7 +5411,7 @@
             </a:pPr>
             <a:r>
               <a:rPr/>
-              <a:t>19/03/2026</a:t>
+              <a:t>22/03/2026</a:t>
             </a:r>
           </a:p>
         </p:txBody>

--- a/materials/OS-M2/OS-M2-S5-preregistration-slides.pptx
+++ b/materials/OS-M2/OS-M2-S5-preregistration-slides.pptx
@@ -5411,7 +5411,7 @@
             </a:pPr>
             <a:r>
               <a:rPr/>
-              <a:t>22/03/2026</a:t>
+              <a:t>29/03/2026</a:t>
             </a:r>
           </a:p>
         </p:txBody>

--- a/materials/OS-M2/OS-M2-S5-preregistration-slides.pptx
+++ b/materials/OS-M2/OS-M2-S5-preregistration-slides.pptx
@@ -5411,7 +5411,7 @@
             </a:pPr>
             <a:r>
               <a:rPr/>
-              <a:t>29/03/2026</a:t>
+              <a:t>01/04/2026</a:t>
             </a:r>
           </a:p>
         </p:txBody>

--- a/materials/OS-M2/OS-M2-S5-preregistration-slides.pptx
+++ b/materials/OS-M2/OS-M2-S5-preregistration-slides.pptx
@@ -5411,7 +5411,7 @@
             </a:pPr>
             <a:r>
               <a:rPr/>
-              <a:t>01/04/2026</a:t>
+              <a:t>05/04/2026</a:t>
             </a:r>
           </a:p>
         </p:txBody>

--- a/materials/OS-M2/OS-M2-S5-preregistration-slides.pptx
+++ b/materials/OS-M2/OS-M2-S5-preregistration-slides.pptx
@@ -5411,7 +5411,7 @@
             </a:pPr>
             <a:r>
               <a:rPr/>
-              <a:t>05/04/2026</a:t>
+              <a:t>08/04/2026</a:t>
             </a:r>
           </a:p>
         </p:txBody>

--- a/materials/OS-M2/OS-M2-S5-preregistration-slides.pptx
+++ b/materials/OS-M2/OS-M2-S5-preregistration-slides.pptx
@@ -5411,7 +5411,7 @@
             </a:pPr>
             <a:r>
               <a:rPr/>
-              <a:t>08/04/2026</a:t>
+              <a:t>10/04/2026</a:t>
             </a:r>
           </a:p>
         </p:txBody>

--- a/materials/OS-M2/OS-M2-S5-preregistration-slides.pptx
+++ b/materials/OS-M2/OS-M2-S5-preregistration-slides.pptx
@@ -5411,7 +5411,7 @@
             </a:pPr>
             <a:r>
               <a:rPr/>
-              <a:t>10/04/2026</a:t>
+              <a:t>12/04/2026</a:t>
             </a:r>
           </a:p>
         </p:txBody>

--- a/materials/OS-M2/OS-M2-S5-preregistration-slides.pptx
+++ b/materials/OS-M2/OS-M2-S5-preregistration-slides.pptx
@@ -5411,7 +5411,7 @@
             </a:pPr>
             <a:r>
               <a:rPr/>
-              <a:t>12/04/2026</a:t>
+              <a:t>15/04/2026</a:t>
             </a:r>
           </a:p>
         </p:txBody>

--- a/materials/OS-M2/OS-M2-S5-preregistration-slides.pptx
+++ b/materials/OS-M2/OS-M2-S5-preregistration-slides.pptx
@@ -5411,7 +5411,7 @@
             </a:pPr>
             <a:r>
               <a:rPr/>
-              <a:t>15/04/2026</a:t>
+              <a:t>19/04/2026</a:t>
             </a:r>
           </a:p>
         </p:txBody>

--- a/materials/OS-M2/OS-M2-S5-preregistration-slides.pptx
+++ b/materials/OS-M2/OS-M2-S5-preregistration-slides.pptx
@@ -5411,7 +5411,7 @@
             </a:pPr>
             <a:r>
               <a:rPr/>
-              <a:t>19/04/2026</a:t>
+              <a:t>26/04/2026</a:t>
             </a:r>
           </a:p>
         </p:txBody>

--- a/materials/OS-M2/OS-M2-S5-preregistration-slides.pptx
+++ b/materials/OS-M2/OS-M2-S5-preregistration-slides.pptx
@@ -5411,7 +5411,7 @@
             </a:pPr>
             <a:r>
               <a:rPr/>
-              <a:t>26/04/2026</a:t>
+              <a:t>29/04/2026</a:t>
             </a:r>
           </a:p>
         </p:txBody>

--- a/materials/OS-M2/OS-M2-S5-preregistration-slides.pptx
+++ b/materials/OS-M2/OS-M2-S5-preregistration-slides.pptx
@@ -5411,7 +5411,7 @@
             </a:pPr>
             <a:r>
               <a:rPr/>
-              <a:t>29/04/2026</a:t>
+              <a:t>03/05/2026</a:t>
             </a:r>
           </a:p>
         </p:txBody>

--- a/materials/OS-M2/OS-M2-S5-preregistration-slides.pptx
+++ b/materials/OS-M2/OS-M2-S5-preregistration-slides.pptx
@@ -5411,7 +5411,7 @@
             </a:pPr>
             <a:r>
               <a:rPr/>
-              <a:t>03/05/2026</a:t>
+              <a:t>06/05/2026</a:t>
             </a:r>
           </a:p>
         </p:txBody>
